--- a/class/cloud_infra_mgmt/05주차_Kubernetes핵심1/01_강의자료/1차시_Service개념.pptx
+++ b/class/cloud_infra_mgmt/05주차_Kubernetes핵심1/01_강의자료/1차시_Service개념.pptx
@@ -8791,7 +8791,7 @@
               </a:lnSpc>
             </a:pPr>
             <a:r>
-              <a:rPr sz="1500" b="1">
+              <a:rPr sz="1700" b="1">
                 <a:solidFill>
                   <a:srgbClr val="0D9488"/>
                 </a:solidFill>
@@ -8800,7 +8800,7 @@
               <a:t>●  </a:t>
             </a:r>
             <a:r>
-              <a:rPr sz="1500" b="0">
+              <a:rPr sz="1700" b="0">
                 <a:solidFill>
                   <a:srgbClr val="222733"/>
                 </a:solidFill>
@@ -8816,7 +8816,7 @@
               </a:lnSpc>
             </a:pPr>
             <a:r>
-              <a:rPr sz="1500" b="1">
+              <a:rPr sz="1700" b="1">
                 <a:solidFill>
                   <a:srgbClr val="0D9488"/>
                 </a:solidFill>
@@ -8825,7 +8825,7 @@
               <a:t>●  </a:t>
             </a:r>
             <a:r>
-              <a:rPr sz="1500" b="0">
+              <a:rPr sz="1700" b="0">
                 <a:solidFill>
                   <a:srgbClr val="222733"/>
                 </a:solidFill>
@@ -8841,7 +8841,7 @@
               </a:lnSpc>
             </a:pPr>
             <a:r>
-              <a:rPr sz="1500" b="1">
+              <a:rPr sz="1700" b="1">
                 <a:solidFill>
                   <a:srgbClr val="0D9488"/>
                 </a:solidFill>
@@ -8850,7 +8850,7 @@
               <a:t>●  </a:t>
             </a:r>
             <a:r>
-              <a:rPr sz="1500" b="0">
+              <a:rPr sz="1700" b="0">
                 <a:solidFill>
                   <a:srgbClr val="222733"/>
                 </a:solidFill>

--- a/class/cloud_infra_mgmt/05주차_Kubernetes핵심1/01_강의자료/1차시_Service개념.pptx
+++ b/class/cloud_infra_mgmt/05주차_Kubernetes핵심1/01_강의자료/1차시_Service개념.pptx
@@ -5086,7 +5086,7 @@
           <a:p>
             <a:pPr>
               <a:lnSpc>
-                <a:spcPct val="115000"/>
+                <a:spcPct val="149500"/>
               </a:lnSpc>
             </a:pPr>
             <a:r>
@@ -5111,7 +5111,7 @@
           <a:p>
             <a:pPr>
               <a:lnSpc>
-                <a:spcPct val="115000"/>
+                <a:spcPct val="149500"/>
               </a:lnSpc>
             </a:pPr>
             <a:r>
@@ -5136,7 +5136,7 @@
           <a:p>
             <a:pPr>
               <a:lnSpc>
-                <a:spcPct val="115000"/>
+                <a:spcPct val="149500"/>
               </a:lnSpc>
             </a:pPr>
             <a:r>
@@ -6385,16 +6385,104 @@
       </p:sp>
       <p:sp>
         <p:nvSpPr>
-          <p:cNvPr id="7" name="Isosceles Triangle 6"/>
+          <p:cNvPr id="7" name="Rectangle 6"/>
           <p:cNvSpPr/>
           <p:nvPr/>
         </p:nvSpPr>
         <p:spPr>
-          <a:xfrm rot="5400000">
-            <a:off x="3495751" y="1673352"/>
-            <a:ext cx="146304" cy="146304"/>
-          </a:xfrm>
-          <a:prstGeom prst="triangle">
+          <a:xfrm>
+            <a:off x="5096865" y="1730959"/>
+            <a:ext cx="1995220" cy="31089"/>
+          </a:xfrm>
+          <a:prstGeom prst="rect">
+            <a:avLst/>
+          </a:prstGeom>
+          <a:solidFill>
+            <a:srgbClr val="14B8A6"/>
+          </a:solidFill>
+          <a:ln>
+            <a:noFill/>
+          </a:ln>
+          <a:effectLst/>
+        </p:spPr>
+        <p:style>
+          <a:lnRef idx="1">
+            <a:schemeClr val="accent1"/>
+          </a:lnRef>
+          <a:fillRef idx="3">
+            <a:schemeClr val="accent1"/>
+          </a:fillRef>
+          <a:effectRef idx="2">
+            <a:schemeClr val="accent1"/>
+          </a:effectRef>
+          <a:fontRef idx="minor">
+            <a:schemeClr val="lt1"/>
+          </a:fontRef>
+        </p:style>
+        <p:txBody>
+          <a:bodyPr rtlCol="0" anchor="ctr"/>
+          <a:lstStyle/>
+          <a:p>
+            <a:pPr algn="ctr"/>
+          </a:p>
+        </p:txBody>
+      </p:sp>
+      <p:sp>
+        <p:nvSpPr>
+          <p:cNvPr id="8" name="Rectangle 7"/>
+          <p:cNvSpPr/>
+          <p:nvPr/>
+        </p:nvSpPr>
+        <p:spPr>
+          <a:xfrm>
+            <a:off x="7622438" y="1730959"/>
+            <a:ext cx="1995220" cy="31089"/>
+          </a:xfrm>
+          <a:prstGeom prst="rect">
+            <a:avLst/>
+          </a:prstGeom>
+          <a:solidFill>
+            <a:srgbClr val="14B8A6"/>
+          </a:solidFill>
+          <a:ln>
+            <a:noFill/>
+          </a:ln>
+          <a:effectLst/>
+        </p:spPr>
+        <p:style>
+          <a:lnRef idx="1">
+            <a:schemeClr val="accent1"/>
+          </a:lnRef>
+          <a:fillRef idx="3">
+            <a:schemeClr val="accent1"/>
+          </a:fillRef>
+          <a:effectRef idx="2">
+            <a:schemeClr val="accent1"/>
+          </a:effectRef>
+          <a:fontRef idx="minor">
+            <a:schemeClr val="lt1"/>
+          </a:fontRef>
+        </p:style>
+        <p:txBody>
+          <a:bodyPr rtlCol="0" anchor="ctr"/>
+          <a:lstStyle/>
+          <a:p>
+            <a:pPr algn="ctr"/>
+          </a:p>
+        </p:txBody>
+      </p:sp>
+      <p:sp>
+        <p:nvSpPr>
+          <p:cNvPr id="9" name="Oval 8"/>
+          <p:cNvSpPr/>
+          <p:nvPr/>
+        </p:nvSpPr>
+        <p:spPr>
+          <a:xfrm>
+            <a:off x="2040940" y="1481328"/>
+            <a:ext cx="530352" cy="530352"/>
+          </a:xfrm>
+          <a:prstGeom prst="ellipse">
             <a:avLst/>
           </a:prstGeom>
           <a:solidFill>
@@ -6429,227 +6517,7 @@
       </p:sp>
       <p:sp>
         <p:nvSpPr>
-          <p:cNvPr id="8" name="Rectangle 7"/>
-          <p:cNvSpPr/>
-          <p:nvPr/>
-        </p:nvSpPr>
-        <p:spPr>
-          <a:xfrm>
-            <a:off x="5096865" y="1730959"/>
-            <a:ext cx="1995220" cy="31089"/>
-          </a:xfrm>
-          <a:prstGeom prst="rect">
-            <a:avLst/>
-          </a:prstGeom>
-          <a:solidFill>
-            <a:srgbClr val="14B8A6"/>
-          </a:solidFill>
-          <a:ln>
-            <a:noFill/>
-          </a:ln>
-          <a:effectLst/>
-        </p:spPr>
-        <p:style>
-          <a:lnRef idx="1">
-            <a:schemeClr val="accent1"/>
-          </a:lnRef>
-          <a:fillRef idx="3">
-            <a:schemeClr val="accent1"/>
-          </a:fillRef>
-          <a:effectRef idx="2">
-            <a:schemeClr val="accent1"/>
-          </a:effectRef>
-          <a:fontRef idx="minor">
-            <a:schemeClr val="lt1"/>
-          </a:fontRef>
-        </p:style>
-        <p:txBody>
-          <a:bodyPr rtlCol="0" anchor="ctr"/>
-          <a:lstStyle/>
-          <a:p>
-            <a:pPr algn="ctr"/>
-          </a:p>
-        </p:txBody>
-      </p:sp>
-      <p:sp>
-        <p:nvSpPr>
-          <p:cNvPr id="9" name="Isosceles Triangle 8"/>
-          <p:cNvSpPr/>
-          <p:nvPr/>
-        </p:nvSpPr>
-        <p:spPr>
-          <a:xfrm rot="5400000">
-            <a:off x="6021324" y="1673352"/>
-            <a:ext cx="146304" cy="146304"/>
-          </a:xfrm>
-          <a:prstGeom prst="triangle">
-            <a:avLst/>
-          </a:prstGeom>
-          <a:solidFill>
-            <a:srgbClr val="0D9488"/>
-          </a:solidFill>
-          <a:ln>
-            <a:noFill/>
-          </a:ln>
-          <a:effectLst/>
-        </p:spPr>
-        <p:style>
-          <a:lnRef idx="1">
-            <a:schemeClr val="accent1"/>
-          </a:lnRef>
-          <a:fillRef idx="3">
-            <a:schemeClr val="accent1"/>
-          </a:fillRef>
-          <a:effectRef idx="2">
-            <a:schemeClr val="accent1"/>
-          </a:effectRef>
-          <a:fontRef idx="minor">
-            <a:schemeClr val="lt1"/>
-          </a:fontRef>
-        </p:style>
-        <p:txBody>
-          <a:bodyPr rtlCol="0" anchor="ctr"/>
-          <a:lstStyle/>
-          <a:p>
-            <a:pPr algn="ctr"/>
-          </a:p>
-        </p:txBody>
-      </p:sp>
-      <p:sp>
-        <p:nvSpPr>
-          <p:cNvPr id="10" name="Rectangle 9"/>
-          <p:cNvSpPr/>
-          <p:nvPr/>
-        </p:nvSpPr>
-        <p:spPr>
-          <a:xfrm>
-            <a:off x="7622438" y="1730959"/>
-            <a:ext cx="1995220" cy="31089"/>
-          </a:xfrm>
-          <a:prstGeom prst="rect">
-            <a:avLst/>
-          </a:prstGeom>
-          <a:solidFill>
-            <a:srgbClr val="14B8A6"/>
-          </a:solidFill>
-          <a:ln>
-            <a:noFill/>
-          </a:ln>
-          <a:effectLst/>
-        </p:spPr>
-        <p:style>
-          <a:lnRef idx="1">
-            <a:schemeClr val="accent1"/>
-          </a:lnRef>
-          <a:fillRef idx="3">
-            <a:schemeClr val="accent1"/>
-          </a:fillRef>
-          <a:effectRef idx="2">
-            <a:schemeClr val="accent1"/>
-          </a:effectRef>
-          <a:fontRef idx="minor">
-            <a:schemeClr val="lt1"/>
-          </a:fontRef>
-        </p:style>
-        <p:txBody>
-          <a:bodyPr rtlCol="0" anchor="ctr"/>
-          <a:lstStyle/>
-          <a:p>
-            <a:pPr algn="ctr"/>
-          </a:p>
-        </p:txBody>
-      </p:sp>
-      <p:sp>
-        <p:nvSpPr>
-          <p:cNvPr id="11" name="Isosceles Triangle 10"/>
-          <p:cNvSpPr/>
-          <p:nvPr/>
-        </p:nvSpPr>
-        <p:spPr>
-          <a:xfrm rot="5400000">
-            <a:off x="8546896" y="1673352"/>
-            <a:ext cx="146304" cy="146304"/>
-          </a:xfrm>
-          <a:prstGeom prst="triangle">
-            <a:avLst/>
-          </a:prstGeom>
-          <a:solidFill>
-            <a:srgbClr val="0D9488"/>
-          </a:solidFill>
-          <a:ln>
-            <a:noFill/>
-          </a:ln>
-          <a:effectLst/>
-        </p:spPr>
-        <p:style>
-          <a:lnRef idx="1">
-            <a:schemeClr val="accent1"/>
-          </a:lnRef>
-          <a:fillRef idx="3">
-            <a:schemeClr val="accent1"/>
-          </a:fillRef>
-          <a:effectRef idx="2">
-            <a:schemeClr val="accent1"/>
-          </a:effectRef>
-          <a:fontRef idx="minor">
-            <a:schemeClr val="lt1"/>
-          </a:fontRef>
-        </p:style>
-        <p:txBody>
-          <a:bodyPr rtlCol="0" anchor="ctr"/>
-          <a:lstStyle/>
-          <a:p>
-            <a:pPr algn="ctr"/>
-          </a:p>
-        </p:txBody>
-      </p:sp>
-      <p:sp>
-        <p:nvSpPr>
-          <p:cNvPr id="12" name="Oval 11"/>
-          <p:cNvSpPr/>
-          <p:nvPr/>
-        </p:nvSpPr>
-        <p:spPr>
-          <a:xfrm>
-            <a:off x="2040940" y="1481328"/>
-            <a:ext cx="530352" cy="530352"/>
-          </a:xfrm>
-          <a:prstGeom prst="ellipse">
-            <a:avLst/>
-          </a:prstGeom>
-          <a:solidFill>
-            <a:srgbClr val="0D9488"/>
-          </a:solidFill>
-          <a:ln>
-            <a:noFill/>
-          </a:ln>
-          <a:effectLst/>
-        </p:spPr>
-        <p:style>
-          <a:lnRef idx="1">
-            <a:schemeClr val="accent1"/>
-          </a:lnRef>
-          <a:fillRef idx="3">
-            <a:schemeClr val="accent1"/>
-          </a:fillRef>
-          <a:effectRef idx="2">
-            <a:schemeClr val="accent1"/>
-          </a:effectRef>
-          <a:fontRef idx="minor">
-            <a:schemeClr val="lt1"/>
-          </a:fontRef>
-        </p:style>
-        <p:txBody>
-          <a:bodyPr rtlCol="0" anchor="ctr"/>
-          <a:lstStyle/>
-          <a:p>
-            <a:pPr algn="ctr"/>
-          </a:p>
-        </p:txBody>
-      </p:sp>
-      <p:sp>
-        <p:nvSpPr>
-          <p:cNvPr id="13" name="TextBox 12"/>
+          <p:cNvPr id="10" name="TextBox 9"/>
           <p:cNvSpPr txBox="1"/>
           <p:nvPr/>
         </p:nvSpPr>
@@ -6684,7 +6552,7 @@
       </p:sp>
       <p:sp>
         <p:nvSpPr>
-          <p:cNvPr id="14" name="Rounded Rectangle 13"/>
+          <p:cNvPr id="11" name="Rounded Rectangle 10"/>
           <p:cNvSpPr/>
           <p:nvPr/>
         </p:nvSpPr>
@@ -6732,7 +6600,7 @@
       </p:sp>
       <p:sp>
         <p:nvSpPr>
-          <p:cNvPr id="15" name="TextBox 14"/>
+          <p:cNvPr id="12" name="TextBox 11"/>
           <p:cNvSpPr txBox="1"/>
           <p:nvPr/>
         </p:nvSpPr>
@@ -6767,7 +6635,7 @@
       </p:sp>
       <p:sp>
         <p:nvSpPr>
-          <p:cNvPr id="16" name="TextBox 15"/>
+          <p:cNvPr id="13" name="TextBox 12"/>
           <p:cNvSpPr txBox="1"/>
           <p:nvPr/>
         </p:nvSpPr>
@@ -6806,7 +6674,7 @@
       </p:sp>
       <p:sp>
         <p:nvSpPr>
-          <p:cNvPr id="17" name="Oval 16"/>
+          <p:cNvPr id="14" name="Oval 13"/>
           <p:cNvSpPr/>
           <p:nvPr/>
         </p:nvSpPr>
@@ -6850,7 +6718,7 @@
       </p:sp>
       <p:sp>
         <p:nvSpPr>
-          <p:cNvPr id="18" name="TextBox 17"/>
+          <p:cNvPr id="15" name="TextBox 14"/>
           <p:cNvSpPr txBox="1"/>
           <p:nvPr/>
         </p:nvSpPr>
@@ -6885,7 +6753,7 @@
       </p:sp>
       <p:sp>
         <p:nvSpPr>
-          <p:cNvPr id="19" name="Rounded Rectangle 18"/>
+          <p:cNvPr id="16" name="Rounded Rectangle 15"/>
           <p:cNvSpPr/>
           <p:nvPr/>
         </p:nvSpPr>
@@ -6933,7 +6801,7 @@
       </p:sp>
       <p:sp>
         <p:nvSpPr>
-          <p:cNvPr id="20" name="TextBox 19"/>
+          <p:cNvPr id="17" name="TextBox 16"/>
           <p:cNvSpPr txBox="1"/>
           <p:nvPr/>
         </p:nvSpPr>
@@ -6968,7 +6836,7 @@
       </p:sp>
       <p:sp>
         <p:nvSpPr>
-          <p:cNvPr id="21" name="TextBox 20"/>
+          <p:cNvPr id="18" name="TextBox 17"/>
           <p:cNvSpPr txBox="1"/>
           <p:nvPr/>
         </p:nvSpPr>
@@ -7007,7 +6875,7 @@
       </p:sp>
       <p:sp>
         <p:nvSpPr>
-          <p:cNvPr id="22" name="Oval 21"/>
+          <p:cNvPr id="19" name="Oval 18"/>
           <p:cNvSpPr/>
           <p:nvPr/>
         </p:nvSpPr>
@@ -7051,7 +6919,7 @@
       </p:sp>
       <p:sp>
         <p:nvSpPr>
-          <p:cNvPr id="23" name="TextBox 22"/>
+          <p:cNvPr id="20" name="TextBox 19"/>
           <p:cNvSpPr txBox="1"/>
           <p:nvPr/>
         </p:nvSpPr>
@@ -7086,7 +6954,7 @@
       </p:sp>
       <p:sp>
         <p:nvSpPr>
-          <p:cNvPr id="24" name="Rounded Rectangle 23"/>
+          <p:cNvPr id="21" name="Rounded Rectangle 20"/>
           <p:cNvSpPr/>
           <p:nvPr/>
         </p:nvSpPr>
@@ -7134,7 +7002,7 @@
       </p:sp>
       <p:sp>
         <p:nvSpPr>
-          <p:cNvPr id="25" name="TextBox 24"/>
+          <p:cNvPr id="22" name="TextBox 21"/>
           <p:cNvSpPr txBox="1"/>
           <p:nvPr/>
         </p:nvSpPr>
@@ -7169,7 +7037,7 @@
       </p:sp>
       <p:sp>
         <p:nvSpPr>
-          <p:cNvPr id="26" name="TextBox 25"/>
+          <p:cNvPr id="23" name="TextBox 22"/>
           <p:cNvSpPr txBox="1"/>
           <p:nvPr/>
         </p:nvSpPr>
@@ -7208,7 +7076,7 @@
       </p:sp>
       <p:sp>
         <p:nvSpPr>
-          <p:cNvPr id="27" name="Oval 26"/>
+          <p:cNvPr id="24" name="Oval 23"/>
           <p:cNvSpPr/>
           <p:nvPr/>
         </p:nvSpPr>
@@ -7252,7 +7120,7 @@
       </p:sp>
       <p:sp>
         <p:nvSpPr>
-          <p:cNvPr id="28" name="TextBox 27"/>
+          <p:cNvPr id="25" name="TextBox 24"/>
           <p:cNvSpPr txBox="1"/>
           <p:nvPr/>
         </p:nvSpPr>
@@ -7287,7 +7155,7 @@
       </p:sp>
       <p:sp>
         <p:nvSpPr>
-          <p:cNvPr id="29" name="Rounded Rectangle 28"/>
+          <p:cNvPr id="26" name="Rounded Rectangle 25"/>
           <p:cNvSpPr/>
           <p:nvPr/>
         </p:nvSpPr>
@@ -7335,7 +7203,7 @@
       </p:sp>
       <p:sp>
         <p:nvSpPr>
-          <p:cNvPr id="30" name="TextBox 29"/>
+          <p:cNvPr id="27" name="TextBox 26"/>
           <p:cNvSpPr txBox="1"/>
           <p:nvPr/>
         </p:nvSpPr>
@@ -7370,7 +7238,7 @@
       </p:sp>
       <p:sp>
         <p:nvSpPr>
-          <p:cNvPr id="31" name="TextBox 30"/>
+          <p:cNvPr id="28" name="TextBox 27"/>
           <p:cNvSpPr txBox="1"/>
           <p:nvPr/>
         </p:nvSpPr>
@@ -7409,7 +7277,7 @@
       </p:sp>
       <p:sp>
         <p:nvSpPr>
-          <p:cNvPr id="32" name="TextBox 31"/>
+          <p:cNvPr id="29" name="TextBox 28"/>
           <p:cNvSpPr txBox="1"/>
           <p:nvPr/>
         </p:nvSpPr>
@@ -7444,7 +7312,7 @@
       </p:sp>
       <p:sp>
         <p:nvSpPr>
-          <p:cNvPr id="33" name="TextBox 32"/>
+          <p:cNvPr id="30" name="TextBox 29"/>
           <p:cNvSpPr txBox="1"/>
           <p:nvPr/>
         </p:nvSpPr>
@@ -7479,7 +7347,7 @@
       </p:sp>
       <p:sp>
         <p:nvSpPr>
-          <p:cNvPr id="34" name="Rectangle 33"/>
+          <p:cNvPr id="31" name="Rectangle 30"/>
           <p:cNvSpPr/>
           <p:nvPr/>
         </p:nvSpPr>
@@ -8003,7 +7871,7 @@
           <a:p>
             <a:pPr>
               <a:lnSpc>
-                <a:spcPct val="115000"/>
+                <a:spcPct val="149500"/>
               </a:lnSpc>
             </a:pPr>
             <a:r>
@@ -8028,7 +7896,7 @@
           <a:p>
             <a:pPr>
               <a:lnSpc>
-                <a:spcPct val="115000"/>
+                <a:spcPct val="149500"/>
               </a:lnSpc>
             </a:pPr>
             <a:r>
@@ -8053,7 +7921,7 @@
           <a:p>
             <a:pPr>
               <a:lnSpc>
-                <a:spcPct val="115000"/>
+                <a:spcPct val="149500"/>
               </a:lnSpc>
             </a:pPr>
             <a:r>
@@ -8787,7 +8655,7 @@
           <a:p>
             <a:pPr>
               <a:lnSpc>
-                <a:spcPct val="115000"/>
+                <a:spcPct val="149500"/>
               </a:lnSpc>
             </a:pPr>
             <a:r>
@@ -8812,7 +8680,7 @@
           <a:p>
             <a:pPr>
               <a:lnSpc>
-                <a:spcPct val="115000"/>
+                <a:spcPct val="149500"/>
               </a:lnSpc>
             </a:pPr>
             <a:r>
@@ -8837,7 +8705,7 @@
           <a:p>
             <a:pPr>
               <a:lnSpc>
-                <a:spcPct val="115000"/>
+                <a:spcPct val="149500"/>
               </a:lnSpc>
             </a:pPr>
             <a:r>
@@ -9500,7 +9368,7 @@
           <a:p>
             <a:pPr>
               <a:lnSpc>
-                <a:spcPct val="115000"/>
+                <a:spcPct val="149500"/>
               </a:lnSpc>
             </a:pPr>
             <a:r>
@@ -9525,7 +9393,7 @@
           <a:p>
             <a:pPr>
               <a:lnSpc>
-                <a:spcPct val="115000"/>
+                <a:spcPct val="149500"/>
               </a:lnSpc>
             </a:pPr>
             <a:r>
@@ -9550,7 +9418,7 @@
           <a:p>
             <a:pPr>
               <a:lnSpc>
-                <a:spcPct val="115000"/>
+                <a:spcPct val="149500"/>
               </a:lnSpc>
             </a:pPr>
             <a:r>
@@ -9941,7 +9809,7 @@
           <a:p>
             <a:pPr>
               <a:lnSpc>
-                <a:spcPct val="115000"/>
+                <a:spcPct val="149500"/>
               </a:lnSpc>
             </a:pPr>
             <a:r>
@@ -9966,7 +9834,7 @@
           <a:p>
             <a:pPr>
               <a:lnSpc>
-                <a:spcPct val="115000"/>
+                <a:spcPct val="149500"/>
               </a:lnSpc>
             </a:pPr>
             <a:r>
@@ -9991,7 +9859,7 @@
           <a:p>
             <a:pPr>
               <a:lnSpc>
-                <a:spcPct val="115000"/>
+                <a:spcPct val="149500"/>
               </a:lnSpc>
             </a:pPr>
             <a:r>
@@ -10016,7 +9884,7 @@
           <a:p>
             <a:pPr>
               <a:lnSpc>
-                <a:spcPct val="115000"/>
+                <a:spcPct val="149500"/>
               </a:lnSpc>
             </a:pPr>
             <a:r>

--- a/class/cloud_infra_mgmt/05주차_Kubernetes핵심1/01_강의자료/1차시_Service개념.pptx
+++ b/class/cloud_infra_mgmt/05주차_Kubernetes핵심1/01_강의자료/1차시_Service개념.pptx
@@ -4722,6 +4722,8 @@
                   <a:srgbClr val="14B8A6"/>
                 </a:solidFill>
                 <a:latin typeface="맑은 고딕"/>
+                <a:ea typeface="맑은 고딕"/>
+                <a:cs typeface="맑은 고딕"/>
               </a:rPr>
               <a:t>클라우드인프라관리  ·  5주차 1차시</a:t>
             </a:r>
@@ -4757,6 +4759,8 @@
                   <a:srgbClr val="FFFFFF"/>
                 </a:solidFill>
                 <a:latin typeface="맑은 고딕"/>
+                <a:ea typeface="맑은 고딕"/>
+                <a:cs typeface="맑은 고딕"/>
               </a:rPr>
               <a:t>Service — 흔들리지 않는 진입점</a:t>
             </a:r>
@@ -4792,6 +4796,8 @@
                   <a:srgbClr val="C9D3E6"/>
                 </a:solidFill>
                 <a:latin typeface="맑은 고딕"/>
+                <a:ea typeface="맑은 고딕"/>
+                <a:cs typeface="맑은 고딕"/>
               </a:rPr>
               <a:t>Pod IP는 왜 불안정한가</a:t>
             </a:r>
@@ -4827,6 +4833,8 @@
                   <a:srgbClr val="FFFFFF"/>
                 </a:solidFill>
                 <a:latin typeface="맑은 고딕"/>
+                <a:ea typeface="맑은 고딕"/>
+                <a:cs typeface="맑은 고딕"/>
               </a:rPr>
               <a:t>영남이공대학교 김지윤교수</a:t>
             </a:r>
@@ -4986,6 +4994,8 @@
                   <a:srgbClr val="14213D"/>
                 </a:solidFill>
                 <a:latin typeface="맑은 고딕"/>
+                <a:ea typeface="맑은 고딕"/>
+                <a:cs typeface="맑은 고딕"/>
               </a:rPr>
               <a:t>03</a:t>
             </a:r>
@@ -5021,6 +5031,8 @@
                   <a:srgbClr val="14B8A6"/>
                 </a:solidFill>
                 <a:latin typeface="맑은 고딕"/>
+                <a:ea typeface="맑은 고딕"/>
+                <a:cs typeface="맑은 고딕"/>
               </a:rPr>
               <a:t>실습 안내</a:t>
             </a:r>
@@ -5056,6 +5068,8 @@
                   <a:srgbClr val="FFFFFF"/>
                 </a:solidFill>
                 <a:latin typeface="맑은 고딕"/>
+                <a:ea typeface="맑은 고딕"/>
+                <a:cs typeface="맑은 고딕"/>
               </a:rPr>
               <a:t>VM 안내</a:t>
             </a:r>
@@ -5095,6 +5109,8 @@
                   <a:srgbClr val="0D9488"/>
                 </a:solidFill>
                 <a:latin typeface="맑은 고딕"/>
+                <a:ea typeface="맑은 고딕"/>
+                <a:cs typeface="맑은 고딕"/>
               </a:rPr>
               <a:t>●  </a:t>
             </a:r>
@@ -5104,6 +5120,8 @@
                   <a:srgbClr val="222733"/>
                 </a:solidFill>
                 <a:latin typeface="맑은 고딕"/>
+                <a:ea typeface="맑은 고딕"/>
+                <a:cs typeface="맑은 고딕"/>
               </a:rPr>
               <a:t>minikube start 및 myapp Deployment가 계속 떠 있는지 확인</a:t>
             </a:r>
@@ -5120,6 +5138,8 @@
                   <a:srgbClr val="0D9488"/>
                 </a:solidFill>
                 <a:latin typeface="맑은 고딕"/>
+                <a:ea typeface="맑은 고딕"/>
+                <a:cs typeface="맑은 고딕"/>
               </a:rPr>
               <a:t>●  </a:t>
             </a:r>
@@ -5129,6 +5149,8 @@
                   <a:srgbClr val="222733"/>
                 </a:solidFill>
                 <a:latin typeface="맑은 고딕"/>
+                <a:ea typeface="맑은 고딕"/>
+                <a:cs typeface="맑은 고딕"/>
               </a:rPr>
               <a:t>kubectl get pods -o wide 로 IP 확인 캡처</a:t>
             </a:r>
@@ -5145,6 +5167,8 @@
                   <a:srgbClr val="0D9488"/>
                 </a:solidFill>
                 <a:latin typeface="맑은 고딕"/>
+                <a:ea typeface="맑은 고딕"/>
+                <a:cs typeface="맑은 고딕"/>
               </a:rPr>
               <a:t>●  </a:t>
             </a:r>
@@ -5154,6 +5178,8 @@
                   <a:srgbClr val="222733"/>
                 </a:solidFill>
                 <a:latin typeface="맑은 고딕"/>
+                <a:ea typeface="맑은 고딕"/>
+                <a:cs typeface="맑은 고딕"/>
               </a:rPr>
               <a:t>다음 차시에 이 Deployment에 Service를 연결하는 실습이 이어집니다</a:t>
             </a:r>
@@ -5189,6 +5215,8 @@
                   <a:srgbClr val="5B6373"/>
                 </a:solidFill>
                 <a:latin typeface="맑은 고딕"/>
+                <a:ea typeface="맑은 고딕"/>
+                <a:cs typeface="맑은 고딕"/>
               </a:rPr>
               <a:t>클라우드인프라관리  ·  5주차 1차시</a:t>
             </a:r>
@@ -5224,6 +5252,8 @@
                   <a:srgbClr val="5B6373"/>
                 </a:solidFill>
                 <a:latin typeface="맑은 고딕"/>
+                <a:ea typeface="맑은 고딕"/>
+                <a:cs typeface="맑은 고딕"/>
               </a:rPr>
               <a:t>10 / 11</a:t>
             </a:r>
@@ -5409,6 +5439,8 @@
                   <a:srgbClr val="FFFFFF"/>
                 </a:solidFill>
                 <a:latin typeface="맑은 고딕"/>
+                <a:ea typeface="맑은 고딕"/>
+                <a:cs typeface="맑은 고딕"/>
               </a:rPr>
               <a:t>오늘의 정리</a:t>
             </a:r>
@@ -5462,6 +5494,8 @@
                   <a:srgbClr val="14213D"/>
                 </a:solidFill>
                 <a:latin typeface="맑은 고딕"/>
+                <a:ea typeface="맑은 고딕"/>
+                <a:cs typeface="맑은 고딕"/>
               </a:rPr>
               <a:t>1</a:t>
             </a:r>
@@ -5497,6 +5531,8 @@
                   <a:srgbClr val="FFFFFF"/>
                 </a:solidFill>
                 <a:latin typeface="맑은 고딕"/>
+                <a:ea typeface="맑은 고딕"/>
+                <a:cs typeface="맑은 고딕"/>
               </a:rPr>
               <a:t>Pod의 IP는 재생성될 때마다 바뀌어 불안정하다</a:t>
             </a:r>
@@ -5550,6 +5586,8 @@
                   <a:srgbClr val="14213D"/>
                 </a:solidFill>
                 <a:latin typeface="맑은 고딕"/>
+                <a:ea typeface="맑은 고딕"/>
+                <a:cs typeface="맑은 고딕"/>
               </a:rPr>
               <a:t>2</a:t>
             </a:r>
@@ -5585,6 +5623,8 @@
                   <a:srgbClr val="FFFFFF"/>
                 </a:solidFill>
                 <a:latin typeface="맑은 고딕"/>
+                <a:ea typeface="맑은 고딕"/>
+                <a:cs typeface="맑은 고딕"/>
               </a:rPr>
               <a:t>Service = 라벨로 Pod를 찾아 연결해주는, 흔들리지 않는 고정 진입점</a:t>
             </a:r>
@@ -5726,6 +5766,8 @@
                   <a:srgbClr val="FFFFFF"/>
                 </a:solidFill>
                 <a:latin typeface="맑은 고딕"/>
+                <a:ea typeface="맑은 고딕"/>
+                <a:cs typeface="맑은 고딕"/>
               </a:rPr>
               <a:t>다음 차시 예고</a:t>
             </a:r>
@@ -5761,6 +5803,8 @@
                   <a:srgbClr val="14B8A6"/>
                 </a:solidFill>
                 <a:latin typeface="맑은 고딕"/>
+                <a:ea typeface="맑은 고딕"/>
+                <a:cs typeface="맑은 고딕"/>
               </a:rPr>
               <a:t>다음 차시 예고 — 5주차 2차시</a:t>
             </a:r>
@@ -5796,6 +5840,8 @@
                   <a:srgbClr val="FFFFFF"/>
                 </a:solidFill>
                 <a:latin typeface="맑은 고딕"/>
+                <a:ea typeface="맑은 고딕"/>
+                <a:cs typeface="맑은 고딕"/>
               </a:rPr>
               <a:t>Service의 세 가지 타입(ClusterIP·NodePort·LoadBalancer)을 비교하고, NodePort로 실제 접속해봅니다.</a:t>
             </a:r>
@@ -5937,6 +5983,8 @@
                   <a:srgbClr val="14B8A6"/>
                 </a:solidFill>
                 <a:latin typeface="맑은 고딕"/>
+                <a:ea typeface="맑은 고딕"/>
+                <a:cs typeface="맑은 고딕"/>
               </a:rPr>
               <a:t>SESSION OVERVIEW</a:t>
             </a:r>
@@ -5972,6 +6020,8 @@
                   <a:srgbClr val="FFFFFF"/>
                 </a:solidFill>
                 <a:latin typeface="맑은 고딕"/>
+                <a:ea typeface="맑은 고딕"/>
+                <a:cs typeface="맑은 고딕"/>
               </a:rPr>
               <a:t>오늘의 학습 목표</a:t>
             </a:r>
@@ -6011,6 +6061,8 @@
                   <a:srgbClr val="222733"/>
                 </a:solidFill>
                 <a:latin typeface="맑은 고딕"/>
+                <a:ea typeface="맑은 고딕"/>
+                <a:cs typeface="맑은 고딕"/>
               </a:rPr>
               <a:t>1.  Pod의 IP가 왜 불안정한지 이해한다</a:t>
             </a:r>
@@ -6027,6 +6079,8 @@
                   <a:srgbClr val="222733"/>
                 </a:solidFill>
                 <a:latin typeface="맑은 고딕"/>
+                <a:ea typeface="맑은 고딕"/>
+                <a:cs typeface="맑은 고딕"/>
               </a:rPr>
               <a:t>2.  Service가 이 문제를 어떻게 해결하는지 이해한다</a:t>
             </a:r>
@@ -6043,6 +6097,8 @@
                   <a:srgbClr val="222733"/>
                 </a:solidFill>
                 <a:latin typeface="맑은 고딕"/>
+                <a:ea typeface="맑은 고딕"/>
+                <a:cs typeface="맑은 고딕"/>
               </a:rPr>
               <a:t>3.  Service가 label selector로 Pod를 찾는 원리를 이해한다</a:t>
             </a:r>
@@ -6078,6 +6134,8 @@
                   <a:srgbClr val="5B6373"/>
                 </a:solidFill>
                 <a:latin typeface="맑은 고딕"/>
+                <a:ea typeface="맑은 고딕"/>
+                <a:cs typeface="맑은 고딕"/>
               </a:rPr>
               <a:t>클라우드인프라관리  ·  5주차 1차시</a:t>
             </a:r>
@@ -6113,6 +6171,8 @@
                   <a:srgbClr val="5B6373"/>
                 </a:solidFill>
                 <a:latin typeface="맑은 고딕"/>
+                <a:ea typeface="맑은 고딕"/>
+                <a:cs typeface="맑은 고딕"/>
               </a:rPr>
               <a:t>02 / 11</a:t>
             </a:r>
@@ -6298,6 +6358,8 @@
                   <a:srgbClr val="14B8A6"/>
                 </a:solidFill>
                 <a:latin typeface="맑은 고딕"/>
+                <a:ea typeface="맑은 고딕"/>
+                <a:cs typeface="맑은 고딕"/>
               </a:rPr>
               <a:t>SESSION OVERVIEW</a:t>
             </a:r>
@@ -6333,6 +6395,8 @@
                   <a:srgbClr val="FFFFFF"/>
                 </a:solidFill>
                 <a:latin typeface="맑은 고딕"/>
+                <a:ea typeface="맑은 고딕"/>
+                <a:cs typeface="맑은 고딕"/>
               </a:rPr>
               <a:t>오늘의 진행 순서</a:t>
             </a:r>
@@ -6544,6 +6608,8 @@
                   <a:srgbClr val="FFFFFF"/>
                 </a:solidFill>
                 <a:latin typeface="맑은 고딕"/>
+                <a:ea typeface="맑은 고딕"/>
+                <a:cs typeface="맑은 고딕"/>
               </a:rPr>
               <a:t>1</a:t>
             </a:r>
@@ -6627,6 +6693,8 @@
                   <a:srgbClr val="14213D"/>
                 </a:solidFill>
                 <a:latin typeface="맑은 고딕"/>
+                <a:ea typeface="맑은 고딕"/>
+                <a:cs typeface="맑은 고딕"/>
               </a:rPr>
               <a:t>개념 설명</a:t>
             </a:r>
@@ -6666,6 +6734,8 @@
                   <a:srgbClr val="222733"/>
                 </a:solidFill>
                 <a:latin typeface="맑은 고딕"/>
+                <a:ea typeface="맑은 고딕"/>
+                <a:cs typeface="맑은 고딕"/>
               </a:rPr>
               <a:t>강의자료 기반 직접 강의</a:t>
             </a:r>
@@ -6745,6 +6815,8 @@
                   <a:srgbClr val="FFFFFF"/>
                 </a:solidFill>
                 <a:latin typeface="맑은 고딕"/>
+                <a:ea typeface="맑은 고딕"/>
+                <a:cs typeface="맑은 고딕"/>
               </a:rPr>
               <a:t>2</a:t>
             </a:r>
@@ -6828,6 +6900,8 @@
                   <a:srgbClr val="14213D"/>
                 </a:solidFill>
                 <a:latin typeface="맑은 고딕"/>
+                <a:ea typeface="맑은 고딕"/>
+                <a:cs typeface="맑은 고딕"/>
               </a:rPr>
               <a:t>Killercoda</a:t>
             </a:r>
@@ -6867,6 +6941,8 @@
                   <a:srgbClr val="222733"/>
                 </a:solidFill>
                 <a:latin typeface="맑은 고딕"/>
+                <a:ea typeface="맑은 고딕"/>
+                <a:cs typeface="맑은 고딕"/>
               </a:rPr>
               <a:t>Service 개념 실습</a:t>
             </a:r>
@@ -6946,6 +7022,8 @@
                   <a:srgbClr val="FFFFFF"/>
                 </a:solidFill>
                 <a:latin typeface="맑은 고딕"/>
+                <a:ea typeface="맑은 고딕"/>
+                <a:cs typeface="맑은 고딕"/>
               </a:rPr>
               <a:t>3</a:t>
             </a:r>
@@ -7029,6 +7107,8 @@
                   <a:srgbClr val="14213D"/>
                 </a:solidFill>
                 <a:latin typeface="맑은 고딕"/>
+                <a:ea typeface="맑은 고딕"/>
+                <a:cs typeface="맑은 고딕"/>
               </a:rPr>
               <a:t>VM 안내</a:t>
             </a:r>
@@ -7068,6 +7148,8 @@
                   <a:srgbClr val="222733"/>
                 </a:solidFill>
                 <a:latin typeface="맑은 고딕"/>
+                <a:ea typeface="맑은 고딕"/>
+                <a:cs typeface="맑은 고딕"/>
               </a:rPr>
               <a:t>다음 차시 예고</a:t>
             </a:r>
@@ -7147,6 +7229,8 @@
                   <a:srgbClr val="FFFFFF"/>
                 </a:solidFill>
                 <a:latin typeface="맑은 고딕"/>
+                <a:ea typeface="맑은 고딕"/>
+                <a:cs typeface="맑은 고딕"/>
               </a:rPr>
               <a:t>4</a:t>
             </a:r>
@@ -7230,6 +7314,8 @@
                   <a:srgbClr val="14213D"/>
                 </a:solidFill>
                 <a:latin typeface="맑은 고딕"/>
+                <a:ea typeface="맑은 고딕"/>
+                <a:cs typeface="맑은 고딕"/>
               </a:rPr>
               <a:t>결과 제출</a:t>
             </a:r>
@@ -7269,6 +7355,8 @@
                   <a:srgbClr val="222733"/>
                 </a:solidFill>
                 <a:latin typeface="맑은 고딕"/>
+                <a:ea typeface="맑은 고딕"/>
+                <a:cs typeface="맑은 고딕"/>
               </a:rPr>
               <a:t>체크리스트 제출</a:t>
             </a:r>
@@ -7304,6 +7392,8 @@
                   <a:srgbClr val="5B6373"/>
                 </a:solidFill>
                 <a:latin typeface="맑은 고딕"/>
+                <a:ea typeface="맑은 고딕"/>
+                <a:cs typeface="맑은 고딕"/>
               </a:rPr>
               <a:t>클라우드인프라관리  ·  5주차 1차시</a:t>
             </a:r>
@@ -7339,6 +7429,8 @@
                   <a:srgbClr val="5B6373"/>
                 </a:solidFill>
                 <a:latin typeface="맑은 고딕"/>
+                <a:ea typeface="맑은 고딕"/>
+                <a:cs typeface="맑은 고딕"/>
               </a:rPr>
               <a:t>03 / 11</a:t>
             </a:r>
@@ -7542,6 +7634,8 @@
                   <a:srgbClr val="14213D"/>
                 </a:solidFill>
                 <a:latin typeface="맑은 고딕"/>
+                <a:ea typeface="맑은 고딕"/>
+                <a:cs typeface="맑은 고딕"/>
               </a:rPr>
               <a:t>PART 01</a:t>
             </a:r>
@@ -7577,6 +7671,8 @@
                   <a:srgbClr val="FFFFFF"/>
                 </a:solidFill>
                 <a:latin typeface="맑은 고딕"/>
+                <a:ea typeface="맑은 고딕"/>
+                <a:cs typeface="맑은 고딕"/>
               </a:rPr>
               <a:t>Pod IP의 문제</a:t>
             </a:r>
@@ -7612,6 +7708,8 @@
                   <a:srgbClr val="C9D3E6"/>
                 </a:solidFill>
                 <a:latin typeface="맑은 고딕"/>
+                <a:ea typeface="맑은 고딕"/>
+                <a:cs typeface="맑은 고딕"/>
               </a:rPr>
               <a:t>왜 Pod IP로 직접 접속하면 안 될까</a:t>
             </a:r>
@@ -7771,6 +7869,8 @@
                   <a:srgbClr val="14213D"/>
                 </a:solidFill>
                 <a:latin typeface="맑은 고딕"/>
+                <a:ea typeface="맑은 고딕"/>
+                <a:cs typeface="맑은 고딕"/>
               </a:rPr>
               <a:t>01</a:t>
             </a:r>
@@ -7806,6 +7906,8 @@
                   <a:srgbClr val="14B8A6"/>
                 </a:solidFill>
                 <a:latin typeface="맑은 고딕"/>
+                <a:ea typeface="맑은 고딕"/>
+                <a:cs typeface="맑은 고딕"/>
               </a:rPr>
               <a:t>PART 1 · Pod IP의 문제</a:t>
             </a:r>
@@ -7841,6 +7943,8 @@
                   <a:srgbClr val="FFFFFF"/>
                 </a:solidFill>
                 <a:latin typeface="맑은 고딕"/>
+                <a:ea typeface="맑은 고딕"/>
+                <a:cs typeface="맑은 고딕"/>
               </a:rPr>
               <a:t>Pod의 IP는 계속 바뀐다</a:t>
             </a:r>
@@ -7880,6 +7984,8 @@
                   <a:srgbClr val="0D9488"/>
                 </a:solidFill>
                 <a:latin typeface="맑은 고딕"/>
+                <a:ea typeface="맑은 고딕"/>
+                <a:cs typeface="맑은 고딕"/>
               </a:rPr>
               <a:t>●  </a:t>
             </a:r>
@@ -7889,6 +7995,8 @@
                   <a:srgbClr val="222733"/>
                 </a:solidFill>
                 <a:latin typeface="맑은 고딕"/>
+                <a:ea typeface="맑은 고딕"/>
+                <a:cs typeface="맑은 고딕"/>
               </a:rPr>
               <a:t>4주차에서 본 것처럼, Pod가 죽으면 새 Pod가 대신 만들어짐</a:t>
             </a:r>
@@ -7905,6 +8013,8 @@
                   <a:srgbClr val="0D9488"/>
                 </a:solidFill>
                 <a:latin typeface="맑은 고딕"/>
+                <a:ea typeface="맑은 고딕"/>
+                <a:cs typeface="맑은 고딕"/>
               </a:rPr>
               <a:t>●  </a:t>
             </a:r>
@@ -7914,6 +8024,8 @@
                   <a:srgbClr val="222733"/>
                 </a:solidFill>
                 <a:latin typeface="맑은 고딕"/>
+                <a:ea typeface="맑은 고딕"/>
+                <a:cs typeface="맑은 고딕"/>
               </a:rPr>
               <a:t>새로 만들어진 Pod는 이전과 '다른' IP 주소를 받음</a:t>
             </a:r>
@@ -7930,6 +8042,8 @@
                   <a:srgbClr val="0D9488"/>
                 </a:solidFill>
                 <a:latin typeface="맑은 고딕"/>
+                <a:ea typeface="맑은 고딕"/>
+                <a:cs typeface="맑은 고딕"/>
               </a:rPr>
               <a:t>●  </a:t>
             </a:r>
@@ -7939,6 +8053,8 @@
                   <a:srgbClr val="222733"/>
                 </a:solidFill>
                 <a:latin typeface="맑은 고딕"/>
+                <a:ea typeface="맑은 고딕"/>
+                <a:cs typeface="맑은 고딕"/>
               </a:rPr>
               <a:t>replicas: 2 처럼 Pod가 여러 개면, 어느 IP로 접속해야 할지도 애매함</a:t>
             </a:r>
@@ -8018,6 +8134,8 @@
                   <a:srgbClr val="FFFFFF"/>
                 </a:solidFill>
                 <a:latin typeface="맑은 고딕"/>
+                <a:ea typeface="맑은 고딕"/>
+                <a:cs typeface="맑은 고딕"/>
               </a:rPr>
               <a:t>🤔  그럼 어떻게 접속해야 할까</a:t>
             </a:r>
@@ -8053,6 +8171,8 @@
                   <a:srgbClr val="FFFFFF"/>
                 </a:solidFill>
                 <a:latin typeface="맑은 고딕"/>
+                <a:ea typeface="맑은 고딕"/>
+                <a:cs typeface="맑은 고딕"/>
               </a:rPr>
               <a:t>Pod의 IP를 직접 외우거나 코드에 박아두면 안 된다 — '고정된 진입점'이 필요하다</a:t>
             </a:r>
@@ -8088,6 +8208,8 @@
                   <a:srgbClr val="5B6373"/>
                 </a:solidFill>
                 <a:latin typeface="맑은 고딕"/>
+                <a:ea typeface="맑은 고딕"/>
+                <a:cs typeface="맑은 고딕"/>
               </a:rPr>
               <a:t>클라우드인프라관리  ·  5주차 1차시</a:t>
             </a:r>
@@ -8123,6 +8245,8 @@
                   <a:srgbClr val="5B6373"/>
                 </a:solidFill>
                 <a:latin typeface="맑은 고딕"/>
+                <a:ea typeface="맑은 고딕"/>
+                <a:cs typeface="맑은 고딕"/>
               </a:rPr>
               <a:t>05 / 11</a:t>
             </a:r>
@@ -8326,6 +8450,8 @@
                   <a:srgbClr val="14213D"/>
                 </a:solidFill>
                 <a:latin typeface="맑은 고딕"/>
+                <a:ea typeface="맑은 고딕"/>
+                <a:cs typeface="맑은 고딕"/>
               </a:rPr>
               <a:t>PART 02</a:t>
             </a:r>
@@ -8361,6 +8487,8 @@
                   <a:srgbClr val="FFFFFF"/>
                 </a:solidFill>
                 <a:latin typeface="맑은 고딕"/>
+                <a:ea typeface="맑은 고딕"/>
+                <a:cs typeface="맑은 고딕"/>
               </a:rPr>
               <a:t>Service란?</a:t>
             </a:r>
@@ -8396,6 +8524,8 @@
                   <a:srgbClr val="C9D3E6"/>
                 </a:solidFill>
                 <a:latin typeface="맑은 고딕"/>
+                <a:ea typeface="맑은 고딕"/>
+                <a:cs typeface="맑은 고딕"/>
               </a:rPr>
               <a:t>흔들리지 않는 하나의 주소</a:t>
             </a:r>
@@ -8555,6 +8685,8 @@
                   <a:srgbClr val="14213D"/>
                 </a:solidFill>
                 <a:latin typeface="맑은 고딕"/>
+                <a:ea typeface="맑은 고딕"/>
+                <a:cs typeface="맑은 고딕"/>
               </a:rPr>
               <a:t>02</a:t>
             </a:r>
@@ -8590,6 +8722,8 @@
                   <a:srgbClr val="14B8A6"/>
                 </a:solidFill>
                 <a:latin typeface="맑은 고딕"/>
+                <a:ea typeface="맑은 고딕"/>
+                <a:cs typeface="맑은 고딕"/>
               </a:rPr>
               <a:t>PART 2 · Service란?</a:t>
             </a:r>
@@ -8625,6 +8759,8 @@
                   <a:srgbClr val="FFFFFF"/>
                 </a:solidFill>
                 <a:latin typeface="맑은 고딕"/>
+                <a:ea typeface="맑은 고딕"/>
+                <a:cs typeface="맑은 고딕"/>
               </a:rPr>
               <a:t>Service = 고정된 진입점</a:t>
             </a:r>
@@ -8664,6 +8800,8 @@
                   <a:srgbClr val="0D9488"/>
                 </a:solidFill>
                 <a:latin typeface="맑은 고딕"/>
+                <a:ea typeface="맑은 고딕"/>
+                <a:cs typeface="맑은 고딕"/>
               </a:rPr>
               <a:t>●  </a:t>
             </a:r>
@@ -8673,6 +8811,8 @@
                   <a:srgbClr val="222733"/>
                 </a:solidFill>
                 <a:latin typeface="맑은 고딕"/>
+                <a:ea typeface="맑은 고딕"/>
+                <a:cs typeface="맑은 고딕"/>
               </a:rPr>
               <a:t>Service는 그 자신만의 고정된 IP·이름을 가짐</a:t>
             </a:r>
@@ -8689,6 +8829,8 @@
                   <a:srgbClr val="0D9488"/>
                 </a:solidFill>
                 <a:latin typeface="맑은 고딕"/>
+                <a:ea typeface="맑은 고딕"/>
+                <a:cs typeface="맑은 고딕"/>
               </a:rPr>
               <a:t>●  </a:t>
             </a:r>
@@ -8698,6 +8840,8 @@
                   <a:srgbClr val="222733"/>
                 </a:solidFill>
                 <a:latin typeface="맑은 고딕"/>
+                <a:ea typeface="맑은 고딕"/>
+                <a:cs typeface="맑은 고딕"/>
               </a:rPr>
               <a:t>요청이 Service로 오면, 뒤에 있는 여러 Pod 중 하나로 자동 전달</a:t>
             </a:r>
@@ -8714,6 +8858,8 @@
                   <a:srgbClr val="0D9488"/>
                 </a:solidFill>
                 <a:latin typeface="맑은 고딕"/>
+                <a:ea typeface="맑은 고딕"/>
+                <a:cs typeface="맑은 고딕"/>
               </a:rPr>
               <a:t>●  </a:t>
             </a:r>
@@ -8723,6 +8869,8 @@
                   <a:srgbClr val="222733"/>
                 </a:solidFill>
                 <a:latin typeface="맑은 고딕"/>
+                <a:ea typeface="맑은 고딕"/>
+                <a:cs typeface="맑은 고딕"/>
               </a:rPr>
               <a:t>Pod가 바뀌어도(IP가 달라져도) Service 주소는 그대로 유지됨</a:t>
             </a:r>
@@ -8758,6 +8906,8 @@
                   <a:srgbClr val="14213D"/>
                 </a:solidFill>
                 <a:latin typeface="맑은 고딕"/>
+                <a:ea typeface="맑은 고딕"/>
+                <a:cs typeface="맑은 고딕"/>
               </a:rPr>
               <a:t>Service의 역할</a:t>
             </a:r>
@@ -8837,6 +8987,8 @@
                   <a:srgbClr val="FFFFFF"/>
                 </a:solidFill>
                 <a:latin typeface="맑은 고딕"/>
+                <a:ea typeface="맑은 고딕"/>
+                <a:cs typeface="맑은 고딕"/>
               </a:rPr>
               <a:t>클라이언트 요청</a:t>
             </a:r>
@@ -8916,6 +9068,8 @@
                   <a:srgbClr val="FFFFFF"/>
                 </a:solidFill>
                 <a:latin typeface="맑은 고딕"/>
+                <a:ea typeface="맑은 고딕"/>
+                <a:cs typeface="맑은 고딕"/>
               </a:rPr>
               <a:t>Service (고정 주소)</a:t>
             </a:r>
@@ -8995,6 +9149,8 @@
                   <a:srgbClr val="FFFFFF"/>
                 </a:solidFill>
                 <a:latin typeface="맑은 고딕"/>
+                <a:ea typeface="맑은 고딕"/>
+                <a:cs typeface="맑은 고딕"/>
               </a:rPr>
               <a:t>Pod A / Pod B / Pod C (IP가 계속 바뀔 수 있음)</a:t>
             </a:r>
@@ -9030,6 +9186,8 @@
                   <a:srgbClr val="5B6373"/>
                 </a:solidFill>
                 <a:latin typeface="맑은 고딕"/>
+                <a:ea typeface="맑은 고딕"/>
+                <a:cs typeface="맑은 고딕"/>
               </a:rPr>
               <a:t>클라우드인프라관리  ·  5주차 1차시</a:t>
             </a:r>
@@ -9065,6 +9223,8 @@
                   <a:srgbClr val="5B6373"/>
                 </a:solidFill>
                 <a:latin typeface="맑은 고딕"/>
+                <a:ea typeface="맑은 고딕"/>
+                <a:cs typeface="맑은 고딕"/>
               </a:rPr>
               <a:t>07 / 11</a:t>
             </a:r>
@@ -9268,6 +9428,8 @@
                   <a:srgbClr val="14213D"/>
                 </a:solidFill>
                 <a:latin typeface="맑은 고딕"/>
+                <a:ea typeface="맑은 고딕"/>
+                <a:cs typeface="맑은 고딕"/>
               </a:rPr>
               <a:t>02</a:t>
             </a:r>
@@ -9303,6 +9465,8 @@
                   <a:srgbClr val="14B8A6"/>
                 </a:solidFill>
                 <a:latin typeface="맑은 고딕"/>
+                <a:ea typeface="맑은 고딕"/>
+                <a:cs typeface="맑은 고딕"/>
               </a:rPr>
               <a:t>PART 2 · Service란?</a:t>
             </a:r>
@@ -9338,6 +9502,8 @@
                   <a:srgbClr val="FFFFFF"/>
                 </a:solidFill>
                 <a:latin typeface="맑은 고딕"/>
+                <a:ea typeface="맑은 고딕"/>
+                <a:cs typeface="맑은 고딕"/>
               </a:rPr>
               <a:t>Service가 Pod를 찾는 방법 — Label Selector</a:t>
             </a:r>
@@ -9377,6 +9543,8 @@
                   <a:srgbClr val="0D9488"/>
                 </a:solidFill>
                 <a:latin typeface="맑은 고딕"/>
+                <a:ea typeface="맑은 고딕"/>
+                <a:cs typeface="맑은 고딕"/>
               </a:rPr>
               <a:t>●  </a:t>
             </a:r>
@@ -9386,6 +9554,8 @@
                   <a:srgbClr val="222733"/>
                 </a:solidFill>
                 <a:latin typeface="맑은 고딕"/>
+                <a:ea typeface="맑은 고딕"/>
+                <a:cs typeface="맑은 고딕"/>
               </a:rPr>
               <a:t>Pod를 만들 때 라벨(label)을 붙임 (예: app: myapp)</a:t>
             </a:r>
@@ -9402,6 +9572,8 @@
                   <a:srgbClr val="0D9488"/>
                 </a:solidFill>
                 <a:latin typeface="맑은 고딕"/>
+                <a:ea typeface="맑은 고딕"/>
+                <a:cs typeface="맑은 고딕"/>
               </a:rPr>
               <a:t>●  </a:t>
             </a:r>
@@ -9411,6 +9583,8 @@
                   <a:srgbClr val="222733"/>
                 </a:solidFill>
                 <a:latin typeface="맑은 고딕"/>
+                <a:ea typeface="맑은 고딕"/>
+                <a:cs typeface="맑은 고딕"/>
               </a:rPr>
               <a:t>Service는 "app: myapp 라벨이 붙은 Pod 전부에게 전달해줘"라고 선언</a:t>
             </a:r>
@@ -9427,6 +9601,8 @@
                   <a:srgbClr val="0D9488"/>
                 </a:solidFill>
                 <a:latin typeface="맑은 고딕"/>
+                <a:ea typeface="맑은 고딕"/>
+                <a:cs typeface="맑은 고딕"/>
               </a:rPr>
               <a:t>●  </a:t>
             </a:r>
@@ -9436,6 +9612,8 @@
                   <a:srgbClr val="222733"/>
                 </a:solidFill>
                 <a:latin typeface="맑은 고딕"/>
+                <a:ea typeface="맑은 고딕"/>
+                <a:cs typeface="맑은 고딕"/>
               </a:rPr>
               <a:t>Pod가 새로 생기거나 없어져도, 같은 라벨만 붙어 있으면 Service가 자동으로 인식</a:t>
             </a:r>
@@ -9471,6 +9649,8 @@
                   <a:srgbClr val="5B6373"/>
                 </a:solidFill>
                 <a:latin typeface="맑은 고딕"/>
+                <a:ea typeface="맑은 고딕"/>
+                <a:cs typeface="맑은 고딕"/>
               </a:rPr>
               <a:t>클라우드인프라관리  ·  5주차 1차시</a:t>
             </a:r>
@@ -9506,6 +9686,8 @@
                   <a:srgbClr val="5B6373"/>
                 </a:solidFill>
                 <a:latin typeface="맑은 고딕"/>
+                <a:ea typeface="맑은 고딕"/>
+                <a:cs typeface="맑은 고딕"/>
               </a:rPr>
               <a:t>08 / 11</a:t>
             </a:r>
@@ -9709,6 +9891,8 @@
                   <a:srgbClr val="14213D"/>
                 </a:solidFill>
                 <a:latin typeface="맑은 고딕"/>
+                <a:ea typeface="맑은 고딕"/>
+                <a:cs typeface="맑은 고딕"/>
               </a:rPr>
               <a:t>03</a:t>
             </a:r>
@@ -9744,6 +9928,8 @@
                   <a:srgbClr val="14B8A6"/>
                 </a:solidFill>
                 <a:latin typeface="맑은 고딕"/>
+                <a:ea typeface="맑은 고딕"/>
+                <a:cs typeface="맑은 고딕"/>
               </a:rPr>
               <a:t>실습 안내</a:t>
             </a:r>
@@ -9779,6 +9965,8 @@
                   <a:srgbClr val="FFFFFF"/>
                 </a:solidFill>
                 <a:latin typeface="맑은 고딕"/>
+                <a:ea typeface="맑은 고딕"/>
+                <a:cs typeface="맑은 고딕"/>
               </a:rPr>
               <a:t>Killercoda — Service 개념 확인</a:t>
             </a:r>
@@ -9818,6 +10006,8 @@
                   <a:srgbClr val="0D9488"/>
                 </a:solidFill>
                 <a:latin typeface="맑은 고딕"/>
+                <a:ea typeface="맑은 고딕"/>
+                <a:cs typeface="맑은 고딕"/>
               </a:rPr>
               <a:t>●  </a:t>
             </a:r>
@@ -9827,6 +10017,8 @@
                   <a:srgbClr val="222733"/>
                 </a:solidFill>
                 <a:latin typeface="맑은 고딕"/>
+                <a:ea typeface="맑은 고딕"/>
+                <a:cs typeface="맑은 고딕"/>
               </a:rPr>
               <a:t>지난 4주차에 만든 myapp Deployment(replicas 2) 재확인</a:t>
             </a:r>
@@ -9843,6 +10035,8 @@
                   <a:srgbClr val="0D9488"/>
                 </a:solidFill>
                 <a:latin typeface="맑은 고딕"/>
+                <a:ea typeface="맑은 고딕"/>
+                <a:cs typeface="맑은 고딕"/>
               </a:rPr>
               <a:t>●  </a:t>
             </a:r>
@@ -9852,6 +10046,8 @@
                   <a:srgbClr val="222733"/>
                 </a:solidFill>
                 <a:latin typeface="맑은 고딕"/>
+                <a:ea typeface="맑은 고딕"/>
+                <a:cs typeface="맑은 고딕"/>
               </a:rPr>
               <a:t>kubectl get pods -o wide  — Pod마다 IP가 다른 것 확인</a:t>
             </a:r>
@@ -9868,6 +10064,8 @@
                   <a:srgbClr val="0D9488"/>
                 </a:solidFill>
                 <a:latin typeface="맑은 고딕"/>
+                <a:ea typeface="맑은 고딕"/>
+                <a:cs typeface="맑은 고딕"/>
               </a:rPr>
               <a:t>●  </a:t>
             </a:r>
@@ -9877,6 +10075,8 @@
                   <a:srgbClr val="222733"/>
                 </a:solidFill>
                 <a:latin typeface="맑은 고딕"/>
+                <a:ea typeface="맑은 고딕"/>
+                <a:cs typeface="맑은 고딕"/>
               </a:rPr>
               <a:t>kubectl get pods -o wide 를 Pod 하나 삭제 후 다시 실행 → IP가 바뀐 것 확인</a:t>
             </a:r>
@@ -9893,6 +10093,8 @@
                   <a:srgbClr val="0D9488"/>
                 </a:solidFill>
                 <a:latin typeface="맑은 고딕"/>
+                <a:ea typeface="맑은 고딕"/>
+                <a:cs typeface="맑은 고딕"/>
               </a:rPr>
               <a:t>●  </a:t>
             </a:r>
@@ -9902,6 +10104,8 @@
                   <a:srgbClr val="222733"/>
                 </a:solidFill>
                 <a:latin typeface="맑은 고딕"/>
+                <a:ea typeface="맑은 고딕"/>
+                <a:cs typeface="맑은 고딕"/>
               </a:rPr>
               <a:t>→ 다음 차시부터 이 문제를 Service로 직접 해결해봅니다</a:t>
             </a:r>
@@ -9937,6 +10141,8 @@
                   <a:srgbClr val="5B6373"/>
                 </a:solidFill>
                 <a:latin typeface="맑은 고딕"/>
+                <a:ea typeface="맑은 고딕"/>
+                <a:cs typeface="맑은 고딕"/>
               </a:rPr>
               <a:t>클라우드인프라관리  ·  5주차 1차시</a:t>
             </a:r>
@@ -9972,6 +10178,8 @@
                   <a:srgbClr val="5B6373"/>
                 </a:solidFill>
                 <a:latin typeface="맑은 고딕"/>
+                <a:ea typeface="맑은 고딕"/>
+                <a:cs typeface="맑은 고딕"/>
               </a:rPr>
               <a:t>09 / 11</a:t>
             </a:r>

--- a/class/cloud_infra_mgmt/05주차_Kubernetes핵심1/01_강의자료/1차시_Service개념.pptx
+++ b/class/cloud_infra_mgmt/05주차_Kubernetes핵심1/01_강의자료/1차시_Service개념.pptx
@@ -5255,7 +5255,7 @@
                 <a:ea typeface="맑은 고딕"/>
                 <a:cs typeface="맑은 고딕"/>
               </a:rPr>
-              <a:t>10 / 11</a:t>
+              <a:t>10 / 12</a:t>
             </a:r>
           </a:p>
         </p:txBody>
@@ -6174,7 +6174,7 @@
                 <a:ea typeface="맑은 고딕"/>
                 <a:cs typeface="맑은 고딕"/>
               </a:rPr>
-              <a:t>02 / 11</a:t>
+              <a:t>02 / 12</a:t>
             </a:r>
           </a:p>
         </p:txBody>
@@ -7151,7 +7151,7 @@
                 <a:ea typeface="맑은 고딕"/>
                 <a:cs typeface="맑은 고딕"/>
               </a:rPr>
-              <a:t>다음 차시 예고</a:t>
+              <a:t>Pod IP 확인·캡처</a:t>
             </a:r>
           </a:p>
         </p:txBody>
@@ -7432,7 +7432,7 @@
                 <a:ea typeface="맑은 고딕"/>
                 <a:cs typeface="맑은 고딕"/>
               </a:rPr>
-              <a:t>03 / 11</a:t>
+              <a:t>03 / 12</a:t>
             </a:r>
           </a:p>
         </p:txBody>
@@ -8248,7 +8248,7 @@
                 <a:ea typeface="맑은 고딕"/>
                 <a:cs typeface="맑은 고딕"/>
               </a:rPr>
-              <a:t>05 / 11</a:t>
+              <a:t>05 / 12</a:t>
             </a:r>
           </a:p>
         </p:txBody>
@@ -9226,7 +9226,7 @@
                 <a:ea typeface="맑은 고딕"/>
                 <a:cs typeface="맑은 고딕"/>
               </a:rPr>
-              <a:t>07 / 11</a:t>
+              <a:t>07 / 12</a:t>
             </a:r>
           </a:p>
         </p:txBody>
@@ -9689,7 +9689,7 @@
                 <a:ea typeface="맑은 고딕"/>
                 <a:cs typeface="맑은 고딕"/>
               </a:rPr>
-              <a:t>08 / 11</a:t>
+              <a:t>08 / 12</a:t>
             </a:r>
           </a:p>
         </p:txBody>
@@ -10181,7 +10181,7 @@
                 <a:ea typeface="맑은 고딕"/>
                 <a:cs typeface="맑은 고딕"/>
               </a:rPr>
-              <a:t>09 / 11</a:t>
+              <a:t>09 / 12</a:t>
             </a:r>
           </a:p>
         </p:txBody>
